--- a/26270 REVIEW 1 PPT.pptx
+++ b/26270 REVIEW 1 PPT.pptx
@@ -3523,7 +3523,7 @@
         </p:nvSpPr>
         <p:spPr>
           <a:xfrm>
-            <a:off x="1501640" y="6057900"/>
+            <a:off x="1475138" y="5968439"/>
             <a:ext cx="15784162" cy="584775"/>
           </a:xfrm>
           <a:prstGeom prst="rect">
@@ -3705,7 +3705,7 @@
                 <a:latin typeface="Cambria" panose="02040503050406030204" pitchFamily="18" charset="0"/>
                 <a:ea typeface="Cambria" panose="02040503050406030204" pitchFamily="18" charset="0"/>
               </a:rPr>
-              <a:t> - Designation</a:t>
+              <a:t> – M.E.PH.D</a:t>
             </a:r>
             <a:endParaRPr lang="en-IN" sz="3000" dirty="0">
               <a:latin typeface="Cambria" panose="02040503050406030204" pitchFamily="18" charset="0"/>
@@ -5225,7 +5225,7 @@
         <p:spPr>
           <a:xfrm>
             <a:off x="2209800" y="1638300"/>
-            <a:ext cx="15082325" cy="8279190"/>
+            <a:ext cx="15082325" cy="5693866"/>
           </a:xfrm>
           <a:prstGeom prst="rect">
             <a:avLst/>
@@ -5244,47 +5244,7 @@
             </a:pPr>
             <a:r>
               <a:rPr lang="en-US" sz="2800" dirty="0"/>
-              <a:t>(Add screenshots of:</a:t>
-            </a:r>
-          </a:p>
-          <a:p>
-            <a:pPr marL="457200" indent="-457200">
-              <a:buFontTx/>
-              <a:buChar char="-"/>
-            </a:pPr>
-            <a:r>
-              <a:rPr lang="en-US" sz="2800" dirty="0"/>
-              <a:t>Home page</a:t>
-            </a:r>
-          </a:p>
-          <a:p>
-            <a:pPr marL="457200" indent="-457200">
-              <a:buFontTx/>
-              <a:buChar char="-"/>
-            </a:pPr>
-            <a:r>
-              <a:rPr lang="en-US" sz="2800" dirty="0"/>
-              <a:t>Login page</a:t>
-            </a:r>
-          </a:p>
-          <a:p>
-            <a:pPr marL="457200" indent="-457200">
-              <a:buFontTx/>
-              <a:buChar char="-"/>
-            </a:pPr>
-            <a:r>
-              <a:rPr lang="en-US" sz="2800" dirty="0"/>
-              <a:t>Main module</a:t>
-            </a:r>
-          </a:p>
-          <a:p>
-            <a:pPr marL="457200" indent="-457200">
-              <a:buFontTx/>
-              <a:buChar char="-"/>
-            </a:pPr>
-            <a:r>
-              <a:rPr lang="en-US" sz="2800" dirty="0"/>
-              <a:t>Output page)</a:t>
+              <a:t>.</a:t>
             </a:r>
           </a:p>
           <a:p>
@@ -5295,12 +5255,6 @@
             <a:endParaRPr lang="en-US" sz="2800" dirty="0"/>
           </a:p>
           <a:p>
-            <a:r>
-              <a:rPr lang="en-US" sz="2800" dirty="0"/>
-              <a:t>Explain each in 1–2 lines.</a:t>
-            </a:r>
-          </a:p>
-          <a:p>
             <a:pPr marL="457200" indent="-457200">
               <a:buFontTx/>
               <a:buChar char="-"/>
@@ -5375,17 +5329,40 @@
               <a:buFontTx/>
               <a:buChar char="-"/>
             </a:pPr>
-            <a:endParaRPr lang="en-US" sz="2800" dirty="0"/>
-          </a:p>
-          <a:p>
-            <a:pPr marL="457200" indent="-457200">
-              <a:buFontTx/>
-              <a:buChar char="-"/>
-            </a:pPr>
             <a:endParaRPr lang="en-IN" sz="2800" dirty="0"/>
           </a:p>
         </p:txBody>
       </p:sp>
+      <p:pic>
+        <p:nvPicPr>
+          <p:cNvPr id="3" name="Picture 2">
+            <a:extLst>
+              <a:ext uri="{FF2B5EF4-FFF2-40B4-BE49-F238E27FC236}">
+                <a16:creationId xmlns:a16="http://schemas.microsoft.com/office/drawing/2014/main" id="{00F54880-076E-5CC9-5733-35BB3A8F707C}"/>
+              </a:ext>
+            </a:extLst>
+          </p:cNvPr>
+          <p:cNvPicPr>
+            <a:picLocks noChangeAspect="1"/>
+          </p:cNvPicPr>
+          <p:nvPr/>
+        </p:nvPicPr>
+        <p:blipFill>
+          <a:blip r:embed="rId4"/>
+          <a:stretch>
+            <a:fillRect/>
+          </a:stretch>
+        </p:blipFill>
+        <p:spPr>
+          <a:xfrm>
+            <a:off x="1808933" y="2475170"/>
+            <a:ext cx="16342231" cy="5944929"/>
+          </a:xfrm>
+          <a:prstGeom prst="rect">
+            <a:avLst/>
+          </a:prstGeom>
+        </p:spPr>
+      </p:pic>
     </p:spTree>
     <p:extLst>
       <p:ext uri="{BB962C8B-B14F-4D97-AF65-F5344CB8AC3E}">
@@ -6859,8 +6836,8 @@
         </p:nvSpPr>
         <p:spPr>
           <a:xfrm>
-            <a:off x="2209800" y="1638300"/>
-            <a:ext cx="15082325" cy="8279190"/>
+            <a:off x="1542490" y="1361556"/>
+            <a:ext cx="20081010" cy="5693866"/>
           </a:xfrm>
           <a:prstGeom prst="rect">
             <a:avLst/>
@@ -6873,54 +6850,7 @@
           </a:bodyPr>
           <a:lstStyle/>
           <a:p>
-            <a:pPr marL="457200" indent="-457200">
-              <a:buFontTx/>
-              <a:buChar char="-"/>
-            </a:pPr>
-            <a:r>
-              <a:rPr lang="en-US" sz="2800" dirty="0"/>
-              <a:t>(Add screenshots of:</a:t>
-            </a:r>
-          </a:p>
-          <a:p>
-            <a:pPr marL="457200" indent="-457200">
-              <a:buFontTx/>
-              <a:buChar char="-"/>
-            </a:pPr>
-            <a:r>
-              <a:rPr lang="en-US" sz="2800" dirty="0"/>
-              <a:t>Home page</a:t>
-            </a:r>
-          </a:p>
-          <a:p>
-            <a:pPr marL="457200" indent="-457200">
-              <a:buFontTx/>
-              <a:buChar char="-"/>
-            </a:pPr>
-            <a:r>
-              <a:rPr lang="en-US" sz="2800" dirty="0"/>
-              <a:t>Login page</a:t>
-            </a:r>
-          </a:p>
-          <a:p>
-            <a:pPr marL="457200" indent="-457200">
-              <a:buFontTx/>
-              <a:buChar char="-"/>
-            </a:pPr>
-            <a:r>
-              <a:rPr lang="en-US" sz="2800" dirty="0"/>
-              <a:t>Main module</a:t>
-            </a:r>
-          </a:p>
-          <a:p>
-            <a:pPr marL="457200" indent="-457200">
-              <a:buFontTx/>
-              <a:buChar char="-"/>
-            </a:pPr>
-            <a:r>
-              <a:rPr lang="en-US" sz="2800" dirty="0"/>
-              <a:t>Output page)</a:t>
-            </a:r>
+            <a:endParaRPr lang="en-US" sz="2800" dirty="0"/>
           </a:p>
           <a:p>
             <a:pPr marL="457200" indent="-457200">
@@ -6930,12 +6860,6 @@
             <a:endParaRPr lang="en-US" sz="2800" dirty="0"/>
           </a:p>
           <a:p>
-            <a:r>
-              <a:rPr lang="en-US" sz="2800" dirty="0"/>
-              <a:t>Explain each in 1–2 lines.</a:t>
-            </a:r>
-          </a:p>
-          <a:p>
             <a:pPr marL="457200" indent="-457200">
               <a:buFontTx/>
               <a:buChar char="-"/>
@@ -7010,17 +6934,57 @@
               <a:buFontTx/>
               <a:buChar char="-"/>
             </a:pPr>
-            <a:endParaRPr lang="en-US" sz="2800" dirty="0"/>
-          </a:p>
-          <a:p>
-            <a:pPr marL="457200" indent="-457200">
-              <a:buFontTx/>
-              <a:buChar char="-"/>
-            </a:pPr>
             <a:endParaRPr lang="en-IN" sz="2800" dirty="0"/>
           </a:p>
         </p:txBody>
       </p:sp>
+      <p:pic>
+        <p:nvPicPr>
+          <p:cNvPr id="1026" name="Picture 2" descr="Free Custom Digital Event Ticket Templates to Drive Sales">
+            <a:extLst>
+              <a:ext uri="{FF2B5EF4-FFF2-40B4-BE49-F238E27FC236}">
+                <a16:creationId xmlns:a16="http://schemas.microsoft.com/office/drawing/2014/main" id="{0C25841A-245C-B5FD-7250-D2E83AE2ECC5}"/>
+              </a:ext>
+            </a:extLst>
+          </p:cNvPr>
+          <p:cNvPicPr>
+            <a:picLocks noChangeAspect="1" noChangeArrowheads="1"/>
+          </p:cNvPicPr>
+          <p:nvPr/>
+        </p:nvPicPr>
+        <p:blipFill>
+          <a:blip r:embed="rId4">
+            <a:extLst>
+              <a:ext uri="{28A0092B-C50C-407E-A947-70E740481C1C}">
+                <a14:useLocalDpi xmlns:a14="http://schemas.microsoft.com/office/drawing/2010/main" val="0"/>
+              </a:ext>
+            </a:extLst>
+          </a:blip>
+          <a:srcRect/>
+          <a:stretch>
+            <a:fillRect/>
+          </a:stretch>
+        </p:blipFill>
+        <p:spPr bwMode="auto">
+          <a:xfrm>
+            <a:off x="2665733" y="1461117"/>
+            <a:ext cx="14644075" cy="8324001"/>
+          </a:xfrm>
+          <a:prstGeom prst="rect">
+            <a:avLst/>
+          </a:prstGeom>
+          <a:noFill/>
+          <a:extLst>
+            <a:ext uri="{909E8E84-426E-40DD-AFC4-6F175D3DCCD1}">
+              <a14:hiddenFill xmlns:a14="http://schemas.microsoft.com/office/drawing/2010/main">
+                <a:solidFill>
+                  <a:srgbClr val="FFFFFF"/>
+                </a:solidFill>
+              </a14:hiddenFill>
+            </a:ext>
+          </a:extLst>
+        </p:spPr>
+      </p:pic>
     </p:spTree>
     <p:extLst>
       <p:ext uri="{BB962C8B-B14F-4D97-AF65-F5344CB8AC3E}">
